--- a/outputs/ophthalmology-batch-20261011/strabismus/slides_editable.pptx
+++ b/outputs/ophthalmology-batch-20261011/strabismus/slides_editable.pptx
@@ -845,7 +845,7 @@
           <a:lstStyle/>
           <a:p>
             <a:r>
-              <a:t>strabismus-09 间歇外斜分型：基本型远近差&lt;10△；分开过强远&gt;近≥15△，遮盖一眼30～60 min仍大；集合不足近&gt;远≥15△；类似分开过强型遮盖后近角增大。</a:t>
+              <a:t>strabismus-09 间歇外斜分型：基本型远近差&lt;10△；分开过强型：远距斜视度较近距大，差值≥15△，遮盖一眼30～60 min仍大；集合不足型：近距斜视度较远距大，差值≥15△；类似分开过强型遮盖后近角增大。</a:t>
             </a:r>
           </a:p>
           <a:p>
@@ -1421,7 +1421,7 @@
           <a:p/>
           <a:p>
             <a:r>
-              <a:t>strabismus-09 间歇外斜分型：基本型远近差&lt;10△；分开过强远&gt;近≥15△，遮盖一眼30～60 min仍大；集合不足近&gt;远≥15△；类似分开过强型遮盖后近角增大。</a:t>
+              <a:t>strabismus-09 间歇外斜分型：基本型远近差&lt;10△；分开过强型：远距斜视度较近距大，差值≥15△，遮盖一眼30～60 min仍大；集合不足型：近距斜视度较远距大，差值≥15△；类似分开过强型遮盖后近角增大。</a:t>
             </a:r>
           </a:p>
           <a:p>
@@ -7990,7 +7990,7 @@
       </p:sp>
       <p:sp>
         <p:nvSpPr>
-          <p:cNvPr id="9" name="基本型远近差&lt;10△；分开过强远&gt;近≥15△，遮盖一眼30～60 min仍大；集合不足近&gt;远≥15△"/>
+          <p:cNvPr id="9" name="基本型远近差&lt;10△；分开过强型：远距斜视度较近距大，差值≥15△，遮盖一眼30～60 min仍大；"/>
           <p:cNvSpPr txBox="1"/>
           <p:nvPr/>
         </p:nvSpPr>
@@ -8030,7 +8030,7 @@
                 <a:ea typeface="Microsoft YaHei"/>
                 <a:cs typeface="Microsoft YaHei"/>
               </a:rPr>
-              <a:t>基本型远近差&lt;10△；分开过强远&gt;近≥15△，遮盖一眼30～60 min仍大；集合不足近&gt;远≥15△；类</a:t>
+              <a:t>基本型远近差&lt;10△；分开过强型：远距斜视度较近距大，差值≥15△，遮盖一眼30～60 min仍大；</a:t>
             </a:r>
           </a:p>
           <a:p>
@@ -8054,7 +8054,7 @@
                 <a:ea typeface="Microsoft YaHei"/>
                 <a:cs typeface="Microsoft YaHei"/>
               </a:rPr>
-              <a:t>似分开过强型遮盖后近角增大。</a:t>
+              <a:t>集合不足型：近距斜视度较远距大，差值≥15△；类似分开过强型遮盖后近角增大。</a:t>
             </a:r>
           </a:p>
         </p:txBody>
@@ -11986,7 +11986,7 @@
       </p:sp>
       <p:sp>
         <p:nvSpPr>
-          <p:cNvPr id="7" name="全面眼检查/双眼视；儿童麻痹验光；急性/非共同或外伤 → 先病因与必要神经/眶影像。"/>
+          <p:cNvPr id="7" name="全面眼检查/双眼视；儿童睫状肌麻痹验光；急性/非共同或外伤 → 先病因与必要神经/眶影像。"/>
           <p:cNvSpPr txBox="1"/>
           <p:nvPr/>
         </p:nvSpPr>
@@ -12026,7 +12026,7 @@
                 <a:ea typeface="Microsoft YaHei"/>
                 <a:cs typeface="Microsoft YaHei"/>
               </a:rPr>
-              <a:t>全面眼检查/双眼视；儿童麻痹验光；急性/非共同或外伤 → 先病</a:t>
+              <a:t>全面眼检查/双眼视；儿童睫状肌麻痹验光；急性/非共同或外伤</a:t>
             </a:r>
           </a:p>
           <a:p>
@@ -12050,7 +12050,7 @@
                 <a:ea typeface="Microsoft YaHei"/>
                 <a:cs typeface="Microsoft YaHei"/>
               </a:rPr>
-              <a:t>因与必要神经/眶影像。</a:t>
+              <a:t>→ 先病因与必要神经/眶影像。</a:t>
             </a:r>
           </a:p>
         </p:txBody>
@@ -13216,7 +13216,7 @@
       </p:sp>
       <p:sp>
         <p:nvSpPr>
-          <p:cNvPr id="32" name="按2026术前方案；术后1天、1周、1/3/6月，后6～12月；术后异常受限+复视及时排滑脱。"/>
+          <p:cNvPr id="32" name="按2026术前方案；术后第1天、第1周、第1、3、6个月，此后每6～12个月；术后异常受限+复视及时"/>
           <p:cNvSpPr txBox="1"/>
           <p:nvPr/>
         </p:nvSpPr>
@@ -13256,7 +13256,7 @@
                 <a:ea typeface="Microsoft YaHei"/>
                 <a:cs typeface="Microsoft YaHei"/>
               </a:rPr>
-              <a:t>按2026术前方案；术后1天、1周、1/3/6月，后6～12月；术后异</a:t>
+              <a:t>按2026术前方案；术后第1天、第1周、第1、3、6个月，此后每</a:t>
             </a:r>
           </a:p>
           <a:p>
@@ -13280,7 +13280,7 @@
                 <a:ea typeface="Microsoft YaHei"/>
                 <a:cs typeface="Microsoft YaHei"/>
               </a:rPr>
-              <a:t>常受限+复视及时排滑脱。</a:t>
+              <a:t>6～12个月；术后异常受限+复视及时排滑脱。</a:t>
             </a:r>
           </a:p>
         </p:txBody>
